--- a/vidio-review-analysis/reports/report_vidio_sports_movies_series.pptx
+++ b/vidio-review-analysis/reports/report_vidio_sports_movies_series.pptx
@@ -3542,7 +3542,7 @@
               </a:defRPr>
             </a:pPr>
             <a:r>
-              <a:t>• Tanggal Terbit: 23 June 2026</a:t>
+              <a:t>• Tanggal Terbit: 25 June 2026</a:t>
             </a:r>
           </a:p>
         </p:txBody>
@@ -4378,6 +4378,42 @@
           </a:p>
         </p:txBody>
       </p:sp>
+      <p:sp>
+        <p:nvSpPr>
+          <p:cNvPr id="19" name="TextBox 18"/>
+          <p:cNvSpPr txBox="1"/>
+          <p:nvPr/>
+        </p:nvSpPr>
+        <p:spPr>
+          <a:xfrm>
+            <a:off x="731520" y="6126480"/>
+            <a:ext cx="10698480" cy="320040"/>
+          </a:xfrm>
+          <a:prstGeom prst="rect">
+            <a:avLst/>
+          </a:prstGeom>
+          <a:noFill/>
+        </p:spPr>
+        <p:txBody>
+          <a:bodyPr wrap="square" lIns="0" tIns="0" bIns="0" rIns="0">
+            <a:spAutoFit/>
+          </a:bodyPr>
+          <a:lstStyle/>
+          <a:p>
+            <a:pPr>
+              <a:defRPr sz="850">
+                <a:solidFill>
+                  <a:srgbClr val="718096"/>
+                </a:solidFill>
+                <a:latin typeface="Segoe UI"/>
+              </a:defRPr>
+            </a:pPr>
+            <a:r>
+              <a:t>⚠️ Catatan Cakupan Data: Analisis ini hanya mencakup ulasan yang memiliki teks komentar. Ulasan dengan rating tanpa komentar tidak diikutsertakan, sehingga distribusi sentimen mencerminkan pengguna yang aktif memberikan pendapat dan dapat condong ke arah negatif dibanding populasi pengguna keseluruhan.</a:t>
+            </a:r>
+          </a:p>
+        </p:txBody>
+      </p:sp>
     </p:spTree>
   </p:cSld>
   <p:clrMapOvr>
@@ -5153,7 +5189,7 @@
               </a:defRPr>
             </a:pPr>
             <a:r>
-              <a:t>Evaluasi CS: Rata-rata reply rate penanganan keluhan adalah 99.0%. Median delay tanggapan berkisar antara 0.98 - 1.42 jam. Penanganan diarahkan dengan rata-rata pengalihan kontak bantuan/layanan admin sebesar 81.7%.</a:t>
+              <a:t>Evaluasi CS: Rata-rata reply rate penanganan keluhan adalah 99.3%. Median delay tanggapan berkisar antara 0.0 jam. Penanganan diarahkan dengan rata-rata pengalihan kontak bantuan/layanan admin sebesar 81.7%.</a:t>
             </a:r>
           </a:p>
         </p:txBody>
